--- a/NOTES/Unit 5 Exception Handling.pptx
+++ b/NOTES/Unit 5 Exception Handling.pptx
@@ -30,14 +30,14 @@
   <p:notesSz cx="6858000" cy="9144000"/>
   <p:embeddedFontLst>
     <p:embeddedFont>
-      <p:font typeface="Calibri" panose="020F0502020204030204" pitchFamily="34" charset="0"/>
+      <p:font typeface="Cambria" panose="02040503050406030204" pitchFamily="18" charset="0"/>
       <p:regular r:id="rId20"/>
       <p:bold r:id="rId21"/>
       <p:italic r:id="rId22"/>
       <p:boldItalic r:id="rId23"/>
     </p:embeddedFont>
     <p:embeddedFont>
-      <p:font typeface="Cambria" panose="02040503050406030204" pitchFamily="18" charset="0"/>
+      <p:font typeface="Calibri" panose="020F0502020204030204" pitchFamily="34" charset="0"/>
       <p:regular r:id="rId24"/>
       <p:bold r:id="rId25"/>
       <p:italic r:id="rId26"/>
@@ -11592,16 +11592,6 @@
               <a:buSzPts val="2400"/>
             </a:pPr>
             <a:r>
-              <a:rPr lang="en-IN" sz="4000" b="1" dirty="0">
-                <a:solidFill>
-                  <a:schemeClr val="bg1"/>
-                </a:solidFill>
-                <a:latin typeface="Cambria" panose="02040503050406030204" pitchFamily="18" charset="0"/>
-                <a:ea typeface="Cambria" panose="02040503050406030204" pitchFamily="18" charset="0"/>
-              </a:rPr>
-              <a:t>Java Language </a:t>
-            </a:r>
-            <a:r>
               <a:rPr lang="en-IN" sz="4000" b="1" dirty="0" smtClean="0">
                 <a:solidFill>
                   <a:schemeClr val="bg1"/>
@@ -11609,7 +11599,7 @@
                 <a:latin typeface="Cambria" panose="02040503050406030204" pitchFamily="18" charset="0"/>
                 <a:ea typeface="Cambria" panose="02040503050406030204" pitchFamily="18" charset="0"/>
               </a:rPr>
-              <a:t>Basics </a:t>
+              <a:t>Exception Handling </a:t>
             </a:r>
             <a:endParaRPr lang="en-US" sz="4000" b="1" dirty="0">
               <a:solidFill>
@@ -12078,10 +12068,6 @@
               </a:rPr>
               <a:t> a = 10 / 0;</a:t>
             </a:r>
-            <a:endParaRPr lang="en-US" sz="2000" dirty="0">
-              <a:latin typeface="Cambria" panose="02040503050406030204" pitchFamily="18" charset="0"/>
-              <a:ea typeface="Cambria" panose="02040503050406030204" pitchFamily="18" charset="0"/>
-            </a:endParaRPr>
           </a:p>
           <a:p>
             <a:pPr algn="just"/>
@@ -12106,10 +12092,6 @@
               </a:rPr>
               <a:t>.</a:t>
             </a:r>
-            <a:endParaRPr lang="en-US" sz="2000" dirty="0">
-              <a:latin typeface="Cambria" panose="02040503050406030204" pitchFamily="18" charset="0"/>
-              <a:ea typeface="Cambria" panose="02040503050406030204" pitchFamily="18" charset="0"/>
-            </a:endParaRPr>
           </a:p>
           <a:p>
             <a:r>
@@ -12297,10 +12279,6 @@
               </a:rPr>
               <a:t>try {</a:t>
             </a:r>
-            <a:endParaRPr lang="en-US" sz="2000" dirty="0">
-              <a:latin typeface="Cambria" panose="02040503050406030204" pitchFamily="18" charset="0"/>
-              <a:ea typeface="Cambria" panose="02040503050406030204" pitchFamily="18" charset="0"/>
-            </a:endParaRPr>
           </a:p>
           <a:p>
             <a:pPr algn="just"/>
@@ -12325,10 +12303,6 @@
               </a:rPr>
               <a:t> result = 10 / 0;</a:t>
             </a:r>
-            <a:endParaRPr lang="en-US" sz="2000" dirty="0">
-              <a:latin typeface="Cambria" panose="02040503050406030204" pitchFamily="18" charset="0"/>
-              <a:ea typeface="Cambria" panose="02040503050406030204" pitchFamily="18" charset="0"/>
-            </a:endParaRPr>
           </a:p>
           <a:p>
             <a:pPr algn="just"/>
@@ -12339,10 +12313,6 @@
               </a:rPr>
               <a:t>}</a:t>
             </a:r>
-            <a:endParaRPr lang="en-US" sz="2000" dirty="0">
-              <a:latin typeface="Cambria" panose="02040503050406030204" pitchFamily="18" charset="0"/>
-              <a:ea typeface="Cambria" panose="02040503050406030204" pitchFamily="18" charset="0"/>
-            </a:endParaRPr>
           </a:p>
           <a:p>
             <a:pPr algn="just"/>
@@ -12367,10 +12337,6 @@
               </a:rPr>
               <a:t> e) {</a:t>
             </a:r>
-            <a:endParaRPr lang="en-US" sz="2000" dirty="0">
-              <a:latin typeface="Cambria" panose="02040503050406030204" pitchFamily="18" charset="0"/>
-              <a:ea typeface="Cambria" panose="02040503050406030204" pitchFamily="18" charset="0"/>
-            </a:endParaRPr>
           </a:p>
           <a:p>
             <a:pPr algn="just"/>
@@ -12395,10 +12361,6 @@
               </a:rPr>
               <a:t>("Cannot divide by zero");</a:t>
             </a:r>
-            <a:endParaRPr lang="en-US" sz="2000" dirty="0">
-              <a:latin typeface="Cambria" panose="02040503050406030204" pitchFamily="18" charset="0"/>
-              <a:ea typeface="Cambria" panose="02040503050406030204" pitchFamily="18" charset="0"/>
-            </a:endParaRPr>
           </a:p>
           <a:p>
             <a:pPr algn="just"/>
@@ -12409,10 +12371,6 @@
               </a:rPr>
               <a:t>}</a:t>
             </a:r>
-            <a:endParaRPr lang="en-US" sz="2000" dirty="0">
-              <a:latin typeface="Cambria" panose="02040503050406030204" pitchFamily="18" charset="0"/>
-              <a:ea typeface="Cambria" panose="02040503050406030204" pitchFamily="18" charset="0"/>
-            </a:endParaRPr>
           </a:p>
           <a:p>
             <a:pPr algn="just"/>
@@ -12480,10 +12438,6 @@
               </a:rPr>
               <a:t>handles exception</a:t>
             </a:r>
-            <a:endParaRPr lang="en-US" sz="2000" dirty="0">
-              <a:latin typeface="Cambria" panose="02040503050406030204" pitchFamily="18" charset="0"/>
-              <a:ea typeface="Cambria" panose="02040503050406030204" pitchFamily="18" charset="0"/>
-            </a:endParaRPr>
           </a:p>
           <a:p>
             <a:r>
@@ -12658,10 +12612,6 @@
               </a:rPr>
               <a:t>try {</a:t>
             </a:r>
-            <a:endParaRPr lang="en-IN" sz="2000" dirty="0">
-              <a:latin typeface="Cambria" panose="02040503050406030204" pitchFamily="18" charset="0"/>
-              <a:ea typeface="Cambria" panose="02040503050406030204" pitchFamily="18" charset="0"/>
-            </a:endParaRPr>
           </a:p>
           <a:p>
             <a:pPr algn="just"/>
@@ -12686,10 +12636,6 @@
               </a:rPr>
               <a:t>[] numbers = {1, 2, 3};</a:t>
             </a:r>
-            <a:endParaRPr lang="en-IN" sz="2000" dirty="0">
-              <a:latin typeface="Cambria" panose="02040503050406030204" pitchFamily="18" charset="0"/>
-              <a:ea typeface="Cambria" panose="02040503050406030204" pitchFamily="18" charset="0"/>
-            </a:endParaRPr>
           </a:p>
           <a:p>
             <a:pPr algn="just"/>
@@ -12714,10 +12660,6 @@
               </a:rPr>
               <a:t>(numbers[5]);</a:t>
             </a:r>
-            <a:endParaRPr lang="en-IN" sz="2000" dirty="0">
-              <a:latin typeface="Cambria" panose="02040503050406030204" pitchFamily="18" charset="0"/>
-              <a:ea typeface="Cambria" panose="02040503050406030204" pitchFamily="18" charset="0"/>
-            </a:endParaRPr>
           </a:p>
           <a:p>
             <a:pPr algn="just"/>
@@ -12728,10 +12670,6 @@
               </a:rPr>
               <a:t>}</a:t>
             </a:r>
-            <a:endParaRPr lang="en-IN" sz="2000" dirty="0">
-              <a:latin typeface="Cambria" panose="02040503050406030204" pitchFamily="18" charset="0"/>
-              <a:ea typeface="Cambria" panose="02040503050406030204" pitchFamily="18" charset="0"/>
-            </a:endParaRPr>
           </a:p>
           <a:p>
             <a:pPr algn="just"/>
@@ -12756,10 +12694,6 @@
               </a:rPr>
               <a:t> e) {</a:t>
             </a:r>
-            <a:endParaRPr lang="en-IN" sz="2000" dirty="0">
-              <a:latin typeface="Cambria" panose="02040503050406030204" pitchFamily="18" charset="0"/>
-              <a:ea typeface="Cambria" panose="02040503050406030204" pitchFamily="18" charset="0"/>
-            </a:endParaRPr>
           </a:p>
           <a:p>
             <a:pPr algn="just"/>
@@ -12784,10 +12718,6 @@
               </a:rPr>
               <a:t>("Arithmetic error");</a:t>
             </a:r>
-            <a:endParaRPr lang="en-IN" sz="2000" dirty="0">
-              <a:latin typeface="Cambria" panose="02040503050406030204" pitchFamily="18" charset="0"/>
-              <a:ea typeface="Cambria" panose="02040503050406030204" pitchFamily="18" charset="0"/>
-            </a:endParaRPr>
           </a:p>
           <a:p>
             <a:pPr algn="just"/>
@@ -12798,10 +12728,6 @@
               </a:rPr>
               <a:t>}</a:t>
             </a:r>
-            <a:endParaRPr lang="en-IN" sz="2000" dirty="0">
-              <a:latin typeface="Cambria" panose="02040503050406030204" pitchFamily="18" charset="0"/>
-              <a:ea typeface="Cambria" panose="02040503050406030204" pitchFamily="18" charset="0"/>
-            </a:endParaRPr>
           </a:p>
           <a:p>
             <a:pPr algn="just"/>
@@ -12826,10 +12752,6 @@
               </a:rPr>
               <a:t> e) {</a:t>
             </a:r>
-            <a:endParaRPr lang="en-IN" sz="2000" dirty="0">
-              <a:latin typeface="Cambria" panose="02040503050406030204" pitchFamily="18" charset="0"/>
-              <a:ea typeface="Cambria" panose="02040503050406030204" pitchFamily="18" charset="0"/>
-            </a:endParaRPr>
           </a:p>
           <a:p>
             <a:pPr algn="just"/>
@@ -12854,10 +12776,6 @@
               </a:rPr>
               <a:t>("Array index error");</a:t>
             </a:r>
-            <a:endParaRPr lang="en-IN" sz="2000" dirty="0">
-              <a:latin typeface="Cambria" panose="02040503050406030204" pitchFamily="18" charset="0"/>
-              <a:ea typeface="Cambria" panose="02040503050406030204" pitchFamily="18" charset="0"/>
-            </a:endParaRPr>
           </a:p>
           <a:p>
             <a:pPr algn="just"/>
@@ -12868,10 +12786,6 @@
               </a:rPr>
               <a:t>}</a:t>
             </a:r>
-            <a:endParaRPr lang="en-IN" sz="2000" dirty="0">
-              <a:latin typeface="Cambria" panose="02040503050406030204" pitchFamily="18" charset="0"/>
-              <a:ea typeface="Cambria" panose="02040503050406030204" pitchFamily="18" charset="0"/>
-            </a:endParaRPr>
           </a:p>
           <a:p>
             <a:pPr algn="just"/>
@@ -12882,10 +12796,6 @@
               </a:rPr>
               <a:t>catch (Exception e) {</a:t>
             </a:r>
-            <a:endParaRPr lang="en-IN" sz="2000" dirty="0">
-              <a:latin typeface="Cambria" panose="02040503050406030204" pitchFamily="18" charset="0"/>
-              <a:ea typeface="Cambria" panose="02040503050406030204" pitchFamily="18" charset="0"/>
-            </a:endParaRPr>
           </a:p>
           <a:p>
             <a:pPr algn="just"/>
@@ -12910,10 +12820,6 @@
               </a:rPr>
               <a:t>("Some other error");</a:t>
             </a:r>
-            <a:endParaRPr lang="en-IN" sz="2000" dirty="0">
-              <a:latin typeface="Cambria" panose="02040503050406030204" pitchFamily="18" charset="0"/>
-              <a:ea typeface="Cambria" panose="02040503050406030204" pitchFamily="18" charset="0"/>
-            </a:endParaRPr>
           </a:p>
           <a:p>
             <a:pPr algn="just"/>
@@ -12924,10 +12830,6 @@
               </a:rPr>
               <a:t>}</a:t>
             </a:r>
-            <a:endParaRPr lang="en-IN" sz="2000" dirty="0">
-              <a:latin typeface="Cambria" panose="02040503050406030204" pitchFamily="18" charset="0"/>
-              <a:ea typeface="Cambria" panose="02040503050406030204" pitchFamily="18" charset="0"/>
-            </a:endParaRPr>
           </a:p>
           <a:p>
             <a:r>
@@ -13156,10 +13058,6 @@
               </a:rPr>
               <a:t>try {</a:t>
             </a:r>
-            <a:endParaRPr lang="en-US" sz="2000" dirty="0">
-              <a:latin typeface="Cambria" panose="02040503050406030204" pitchFamily="18" charset="0"/>
-              <a:ea typeface="Cambria" panose="02040503050406030204" pitchFamily="18" charset="0"/>
-            </a:endParaRPr>
           </a:p>
           <a:p>
             <a:pPr algn="just"/>
@@ -13184,10 +13082,6 @@
               </a:rPr>
               <a:t>("Try block");</a:t>
             </a:r>
-            <a:endParaRPr lang="en-US" sz="2000" dirty="0">
-              <a:latin typeface="Cambria" panose="02040503050406030204" pitchFamily="18" charset="0"/>
-              <a:ea typeface="Cambria" panose="02040503050406030204" pitchFamily="18" charset="0"/>
-            </a:endParaRPr>
           </a:p>
           <a:p>
             <a:pPr algn="just"/>
@@ -13198,10 +13092,6 @@
               </a:rPr>
               <a:t>}</a:t>
             </a:r>
-            <a:endParaRPr lang="en-US" sz="2000" dirty="0">
-              <a:latin typeface="Cambria" panose="02040503050406030204" pitchFamily="18" charset="0"/>
-              <a:ea typeface="Cambria" panose="02040503050406030204" pitchFamily="18" charset="0"/>
-            </a:endParaRPr>
           </a:p>
           <a:p>
             <a:pPr algn="just"/>
@@ -13212,10 +13102,6 @@
               </a:rPr>
               <a:t>catch (Exception e) {</a:t>
             </a:r>
-            <a:endParaRPr lang="en-US" sz="2000" dirty="0">
-              <a:latin typeface="Cambria" panose="02040503050406030204" pitchFamily="18" charset="0"/>
-              <a:ea typeface="Cambria" panose="02040503050406030204" pitchFamily="18" charset="0"/>
-            </a:endParaRPr>
           </a:p>
           <a:p>
             <a:pPr algn="just"/>
@@ -13240,10 +13126,6 @@
               </a:rPr>
               <a:t>("Exception occurred");</a:t>
             </a:r>
-            <a:endParaRPr lang="en-US" sz="2000" dirty="0">
-              <a:latin typeface="Cambria" panose="02040503050406030204" pitchFamily="18" charset="0"/>
-              <a:ea typeface="Cambria" panose="02040503050406030204" pitchFamily="18" charset="0"/>
-            </a:endParaRPr>
           </a:p>
           <a:p>
             <a:pPr algn="just"/>
@@ -13254,10 +13136,6 @@
               </a:rPr>
               <a:t>}</a:t>
             </a:r>
-            <a:endParaRPr lang="en-US" sz="2000" dirty="0">
-              <a:latin typeface="Cambria" panose="02040503050406030204" pitchFamily="18" charset="0"/>
-              <a:ea typeface="Cambria" panose="02040503050406030204" pitchFamily="18" charset="0"/>
-            </a:endParaRPr>
           </a:p>
           <a:p>
             <a:pPr algn="just"/>
@@ -13268,10 +13146,6 @@
               </a:rPr>
               <a:t>finally {</a:t>
             </a:r>
-            <a:endParaRPr lang="en-US" sz="2000" dirty="0">
-              <a:latin typeface="Cambria" panose="02040503050406030204" pitchFamily="18" charset="0"/>
-              <a:ea typeface="Cambria" panose="02040503050406030204" pitchFamily="18" charset="0"/>
-            </a:endParaRPr>
           </a:p>
           <a:p>
             <a:pPr algn="just"/>
@@ -13296,10 +13170,6 @@
               </a:rPr>
               <a:t>("Cleanup code");</a:t>
             </a:r>
-            <a:endParaRPr lang="en-US" sz="2000" dirty="0">
-              <a:latin typeface="Cambria" panose="02040503050406030204" pitchFamily="18" charset="0"/>
-              <a:ea typeface="Cambria" panose="02040503050406030204" pitchFamily="18" charset="0"/>
-            </a:endParaRPr>
           </a:p>
           <a:p>
             <a:pPr algn="just"/>
@@ -13310,10 +13180,6 @@
               </a:rPr>
               <a:t>}</a:t>
             </a:r>
-            <a:endParaRPr lang="en-US" sz="2000" dirty="0">
-              <a:latin typeface="Cambria" panose="02040503050406030204" pitchFamily="18" charset="0"/>
-              <a:ea typeface="Cambria" panose="02040503050406030204" pitchFamily="18" charset="0"/>
-            </a:endParaRPr>
           </a:p>
           <a:p>
             <a:r>
@@ -13498,10 +13364,6 @@
               </a:rPr>
               <a:t> age = 15;</a:t>
             </a:r>
-            <a:endParaRPr lang="en-US" sz="2000" dirty="0">
-              <a:latin typeface="Cambria" panose="02040503050406030204" pitchFamily="18" charset="0"/>
-              <a:ea typeface="Cambria" panose="02040503050406030204" pitchFamily="18" charset="0"/>
-            </a:endParaRPr>
           </a:p>
           <a:p>
             <a:pPr algn="just"/>
@@ -13525,10 +13387,6 @@
               </a:rPr>
               <a:t>if (age &lt; 18) {</a:t>
             </a:r>
-            <a:endParaRPr lang="en-US" sz="2000" dirty="0">
-              <a:latin typeface="Cambria" panose="02040503050406030204" pitchFamily="18" charset="0"/>
-              <a:ea typeface="Cambria" panose="02040503050406030204" pitchFamily="18" charset="0"/>
-            </a:endParaRPr>
           </a:p>
           <a:p>
             <a:pPr algn="just"/>
@@ -13553,10 +13411,6 @@
               </a:rPr>
               <a:t>("Age must be 18 or above");</a:t>
             </a:r>
-            <a:endParaRPr lang="en-US" sz="2000" dirty="0">
-              <a:latin typeface="Cambria" panose="02040503050406030204" pitchFamily="18" charset="0"/>
-              <a:ea typeface="Cambria" panose="02040503050406030204" pitchFamily="18" charset="0"/>
-            </a:endParaRPr>
           </a:p>
           <a:p>
             <a:pPr algn="just"/>
@@ -13567,10 +13421,6 @@
               </a:rPr>
               <a:t>}</a:t>
             </a:r>
-            <a:endParaRPr lang="en-US" sz="2000" dirty="0">
-              <a:latin typeface="Cambria" panose="02040503050406030204" pitchFamily="18" charset="0"/>
-              <a:ea typeface="Cambria" panose="02040503050406030204" pitchFamily="18" charset="0"/>
-            </a:endParaRPr>
           </a:p>
           <a:p>
             <a:r>
@@ -13593,10 +13443,6 @@
               </a:rPr>
               <a:t>throw is used to actually throw a specific exception object.</a:t>
             </a:r>
-            <a:endParaRPr lang="en-US" sz="2000" dirty="0">
-              <a:latin typeface="Cambria" panose="02040503050406030204" pitchFamily="18" charset="0"/>
-              <a:ea typeface="Cambria" panose="02040503050406030204" pitchFamily="18" charset="0"/>
-            </a:endParaRPr>
           </a:p>
           <a:p>
             <a:r>
@@ -13809,10 +13655,6 @@
               </a:rPr>
               <a:t> {</a:t>
             </a:r>
-            <a:endParaRPr lang="en-US" sz="2000" dirty="0">
-              <a:latin typeface="Cambria" panose="02040503050406030204" pitchFamily="18" charset="0"/>
-              <a:ea typeface="Cambria" panose="02040503050406030204" pitchFamily="18" charset="0"/>
-            </a:endParaRPr>
           </a:p>
           <a:p>
             <a:pPr algn="just"/>
@@ -13851,10 +13693,6 @@
               </a:rPr>
               <a:t>("data.txt");</a:t>
             </a:r>
-            <a:endParaRPr lang="en-US" sz="2000" dirty="0">
-              <a:latin typeface="Cambria" panose="02040503050406030204" pitchFamily="18" charset="0"/>
-              <a:ea typeface="Cambria" panose="02040503050406030204" pitchFamily="18" charset="0"/>
-            </a:endParaRPr>
           </a:p>
           <a:p>
             <a:pPr algn="just"/>
@@ -13865,10 +13703,6 @@
               </a:rPr>
               <a:t>}</a:t>
             </a:r>
-            <a:endParaRPr lang="en-US" sz="2000" dirty="0">
-              <a:latin typeface="Cambria" panose="02040503050406030204" pitchFamily="18" charset="0"/>
-              <a:ea typeface="Cambria" panose="02040503050406030204" pitchFamily="18" charset="0"/>
-            </a:endParaRPr>
           </a:p>
           <a:p>
             <a:pPr algn="just"/>
@@ -14115,10 +13949,6 @@
               </a:rPr>
               <a:t> extends Exception {</a:t>
             </a:r>
-            <a:endParaRPr lang="en-US" sz="2000" dirty="0">
-              <a:latin typeface="Cambria" panose="02040503050406030204" pitchFamily="18" charset="0"/>
-              <a:ea typeface="Cambria" panose="02040503050406030204" pitchFamily="18" charset="0"/>
-            </a:endParaRPr>
           </a:p>
           <a:p>
             <a:pPr algn="just"/>
@@ -14143,10 +13973,6 @@
               </a:rPr>
               <a:t>(String message) {</a:t>
             </a:r>
-            <a:endParaRPr lang="en-US" sz="2000" dirty="0">
-              <a:latin typeface="Cambria" panose="02040503050406030204" pitchFamily="18" charset="0"/>
-              <a:ea typeface="Cambria" panose="02040503050406030204" pitchFamily="18" charset="0"/>
-            </a:endParaRPr>
           </a:p>
           <a:p>
             <a:pPr algn="just"/>
@@ -14157,10 +13983,6 @@
               </a:rPr>
               <a:t>        super(message);</a:t>
             </a:r>
-            <a:endParaRPr lang="en-US" sz="2000" dirty="0">
-              <a:latin typeface="Cambria" panose="02040503050406030204" pitchFamily="18" charset="0"/>
-              <a:ea typeface="Cambria" panose="02040503050406030204" pitchFamily="18" charset="0"/>
-            </a:endParaRPr>
           </a:p>
           <a:p>
             <a:pPr algn="just"/>
@@ -14171,10 +13993,6 @@
               </a:rPr>
               <a:t>    }</a:t>
             </a:r>
-            <a:endParaRPr lang="en-US" sz="2000" dirty="0">
-              <a:latin typeface="Cambria" panose="02040503050406030204" pitchFamily="18" charset="0"/>
-              <a:ea typeface="Cambria" panose="02040503050406030204" pitchFamily="18" charset="0"/>
-            </a:endParaRPr>
           </a:p>
           <a:p>
             <a:pPr algn="just"/>
@@ -14216,10 +14034,6 @@
               </a:rPr>
               <a:t>if (age &lt; 18) {</a:t>
             </a:r>
-            <a:endParaRPr lang="en-US" sz="2000" dirty="0">
-              <a:latin typeface="Cambria" panose="02040503050406030204" pitchFamily="18" charset="0"/>
-              <a:ea typeface="Cambria" panose="02040503050406030204" pitchFamily="18" charset="0"/>
-            </a:endParaRPr>
           </a:p>
           <a:p>
             <a:pPr algn="just"/>
@@ -14244,10 +14058,6 @@
               </a:rPr>
               <a:t>("Not eligible");</a:t>
             </a:r>
-            <a:endParaRPr lang="en-US" sz="2000" dirty="0">
-              <a:latin typeface="Cambria" panose="02040503050406030204" pitchFamily="18" charset="0"/>
-              <a:ea typeface="Cambria" panose="02040503050406030204" pitchFamily="18" charset="0"/>
-            </a:endParaRPr>
           </a:p>
           <a:p>
             <a:pPr algn="just"/>
@@ -14258,10 +14068,6 @@
               </a:rPr>
               <a:t>}</a:t>
             </a:r>
-            <a:endParaRPr lang="en-US" sz="2000" dirty="0">
-              <a:latin typeface="Cambria" panose="02040503050406030204" pitchFamily="18" charset="0"/>
-              <a:ea typeface="Cambria" panose="02040503050406030204" pitchFamily="18" charset="0"/>
-            </a:endParaRPr>
           </a:p>
           <a:p>
             <a:pPr algn="just"/>
@@ -14354,8 +14160,8 @@
         </p:nvSpPr>
         <p:spPr>
           <a:xfrm>
-            <a:off x="922020" y="887135"/>
-            <a:ext cx="10645140" cy="6555641"/>
+            <a:off x="815340" y="635340"/>
+            <a:ext cx="10645140" cy="6924973"/>
           </a:xfrm>
           <a:prstGeom prst="rect">
             <a:avLst/>
@@ -14396,10 +14202,6 @@
               </a:rPr>
               <a:t>public class Example {</a:t>
             </a:r>
-            <a:endParaRPr lang="en-IN" sz="2000" dirty="0">
-              <a:latin typeface="Cambria" panose="02040503050406030204" pitchFamily="18" charset="0"/>
-              <a:ea typeface="Cambria" panose="02040503050406030204" pitchFamily="18" charset="0"/>
-            </a:endParaRPr>
           </a:p>
           <a:p>
             <a:r>
@@ -14423,10 +14225,6 @@
               </a:rPr>
               <a:t>) {</a:t>
             </a:r>
-            <a:endParaRPr lang="en-IN" sz="2000" dirty="0">
-              <a:latin typeface="Cambria" panose="02040503050406030204" pitchFamily="18" charset="0"/>
-              <a:ea typeface="Cambria" panose="02040503050406030204" pitchFamily="18" charset="0"/>
-            </a:endParaRPr>
           </a:p>
           <a:p>
             <a:r>
@@ -14449,10 +14247,6 @@
               </a:rPr>
               <a:t>        try {</a:t>
             </a:r>
-            <a:endParaRPr lang="en-IN" sz="2000" dirty="0">
-              <a:latin typeface="Cambria" panose="02040503050406030204" pitchFamily="18" charset="0"/>
-              <a:ea typeface="Cambria" panose="02040503050406030204" pitchFamily="18" charset="0"/>
-            </a:endParaRPr>
           </a:p>
           <a:p>
             <a:r>
@@ -14476,10 +14270,6 @@
               </a:rPr>
               <a:t> a = 10;</a:t>
             </a:r>
-            <a:endParaRPr lang="en-IN" sz="2000" dirty="0">
-              <a:latin typeface="Cambria" panose="02040503050406030204" pitchFamily="18" charset="0"/>
-              <a:ea typeface="Cambria" panose="02040503050406030204" pitchFamily="18" charset="0"/>
-            </a:endParaRPr>
           </a:p>
           <a:p>
             <a:r>
@@ -14503,10 +14293,6 @@
               </a:rPr>
               <a:t> b = 0;</a:t>
             </a:r>
-            <a:endParaRPr lang="en-IN" sz="2000" dirty="0">
-              <a:latin typeface="Cambria" panose="02040503050406030204" pitchFamily="18" charset="0"/>
-              <a:ea typeface="Cambria" panose="02040503050406030204" pitchFamily="18" charset="0"/>
-            </a:endParaRPr>
           </a:p>
           <a:p>
             <a:r>
@@ -14530,10 +14316,6 @@
               </a:rPr>
               <a:t> result = a / b;</a:t>
             </a:r>
-            <a:endParaRPr lang="en-IN" sz="2000" dirty="0">
-              <a:latin typeface="Cambria" panose="02040503050406030204" pitchFamily="18" charset="0"/>
-              <a:ea typeface="Cambria" panose="02040503050406030204" pitchFamily="18" charset="0"/>
-            </a:endParaRPr>
           </a:p>
           <a:p>
             <a:r>
@@ -14557,10 +14339,6 @@
               </a:rPr>
               <a:t>(result);</a:t>
             </a:r>
-            <a:endParaRPr lang="en-IN" sz="2000" dirty="0">
-              <a:latin typeface="Cambria" panose="02040503050406030204" pitchFamily="18" charset="0"/>
-              <a:ea typeface="Cambria" panose="02040503050406030204" pitchFamily="18" charset="0"/>
-            </a:endParaRPr>
           </a:p>
           <a:p>
             <a:r>
@@ -14570,10 +14348,6 @@
               </a:rPr>
               <a:t>        }</a:t>
             </a:r>
-            <a:endParaRPr lang="en-IN" sz="2000" dirty="0">
-              <a:latin typeface="Cambria" panose="02040503050406030204" pitchFamily="18" charset="0"/>
-              <a:ea typeface="Cambria" panose="02040503050406030204" pitchFamily="18" charset="0"/>
-            </a:endParaRPr>
           </a:p>
           <a:p>
             <a:r>
@@ -14595,12 +14369,15 @@
                 <a:latin typeface="Cambria" panose="02040503050406030204" pitchFamily="18" charset="0"/>
                 <a:ea typeface="Cambria" panose="02040503050406030204" pitchFamily="18" charset="0"/>
               </a:rPr>
-              <a:t> e) {</a:t>
-            </a:r>
-            <a:endParaRPr lang="en-IN" sz="2000" dirty="0">
-              <a:latin typeface="Cambria" panose="02040503050406030204" pitchFamily="18" charset="0"/>
-              <a:ea typeface="Cambria" panose="02040503050406030204" pitchFamily="18" charset="0"/>
-            </a:endParaRPr>
+              <a:t> e</a:t>
+            </a:r>
+            <a:r>
+              <a:rPr lang="en-IN" sz="2000" dirty="0" smtClean="0">
+                <a:latin typeface="Cambria" panose="02040503050406030204" pitchFamily="18" charset="0"/>
+                <a:ea typeface="Cambria" panose="02040503050406030204" pitchFamily="18" charset="0"/>
+              </a:rPr>
+              <a:t>)</a:t>
+            </a:r>
           </a:p>
           <a:p>
             <a:r>
@@ -14608,6 +14385,29 @@
                 <a:latin typeface="Cambria" panose="02040503050406030204" pitchFamily="18" charset="0"/>
                 <a:ea typeface="Cambria" panose="02040503050406030204" pitchFamily="18" charset="0"/>
               </a:rPr>
+              <a:t> </a:t>
+            </a:r>
+            <a:r>
+              <a:rPr lang="en-IN" sz="2000" dirty="0" smtClean="0">
+                <a:latin typeface="Cambria" panose="02040503050406030204" pitchFamily="18" charset="0"/>
+                <a:ea typeface="Cambria" panose="02040503050406030204" pitchFamily="18" charset="0"/>
+              </a:rPr>
+              <a:t>      </a:t>
+            </a:r>
+            <a:r>
+              <a:rPr lang="en-IN" sz="2000" dirty="0">
+                <a:latin typeface="Cambria" panose="02040503050406030204" pitchFamily="18" charset="0"/>
+                <a:ea typeface="Cambria" panose="02040503050406030204" pitchFamily="18" charset="0"/>
+              </a:rPr>
+              <a:t>{</a:t>
+            </a:r>
+          </a:p>
+          <a:p>
+            <a:r>
+              <a:rPr lang="en-IN" sz="2000" dirty="0">
+                <a:latin typeface="Cambria" panose="02040503050406030204" pitchFamily="18" charset="0"/>
+                <a:ea typeface="Cambria" panose="02040503050406030204" pitchFamily="18" charset="0"/>
+              </a:rPr>
               <a:t>            </a:t>
             </a:r>
             <a:r>
@@ -14624,10 +14424,6 @@
               </a:rPr>
               <a:t>("Error: Division by zero");</a:t>
             </a:r>
-            <a:endParaRPr lang="en-IN" sz="2000" dirty="0">
-              <a:latin typeface="Cambria" panose="02040503050406030204" pitchFamily="18" charset="0"/>
-              <a:ea typeface="Cambria" panose="02040503050406030204" pitchFamily="18" charset="0"/>
-            </a:endParaRPr>
           </a:p>
           <a:p>
             <a:r>
@@ -14637,10 +14433,6 @@
               </a:rPr>
               <a:t>        }</a:t>
             </a:r>
-            <a:endParaRPr lang="en-IN" sz="2000" dirty="0">
-              <a:latin typeface="Cambria" panose="02040503050406030204" pitchFamily="18" charset="0"/>
-              <a:ea typeface="Cambria" panose="02040503050406030204" pitchFamily="18" charset="0"/>
-            </a:endParaRPr>
           </a:p>
           <a:p>
             <a:r>
@@ -14650,10 +14442,6 @@
               </a:rPr>
               <a:t>        finally {</a:t>
             </a:r>
-            <a:endParaRPr lang="en-IN" sz="2000" dirty="0">
-              <a:latin typeface="Cambria" panose="02040503050406030204" pitchFamily="18" charset="0"/>
-              <a:ea typeface="Cambria" panose="02040503050406030204" pitchFamily="18" charset="0"/>
-            </a:endParaRPr>
           </a:p>
           <a:p>
             <a:r>
@@ -14677,10 +14465,6 @@
               </a:rPr>
               <a:t>("Program completed");</a:t>
             </a:r>
-            <a:endParaRPr lang="en-IN" sz="2000" dirty="0">
-              <a:latin typeface="Cambria" panose="02040503050406030204" pitchFamily="18" charset="0"/>
-              <a:ea typeface="Cambria" panose="02040503050406030204" pitchFamily="18" charset="0"/>
-            </a:endParaRPr>
           </a:p>
           <a:p>
             <a:r>
@@ -14690,10 +14474,6 @@
               </a:rPr>
               <a:t>        }</a:t>
             </a:r>
-            <a:endParaRPr lang="en-IN" sz="2000" dirty="0">
-              <a:latin typeface="Cambria" panose="02040503050406030204" pitchFamily="18" charset="0"/>
-              <a:ea typeface="Cambria" panose="02040503050406030204" pitchFamily="18" charset="0"/>
-            </a:endParaRPr>
           </a:p>
           <a:p>
             <a:r>
@@ -14703,10 +14483,6 @@
               </a:rPr>
               <a:t>    }</a:t>
             </a:r>
-            <a:endParaRPr lang="en-IN" sz="2000" dirty="0">
-              <a:latin typeface="Cambria" panose="02040503050406030204" pitchFamily="18" charset="0"/>
-              <a:ea typeface="Cambria" panose="02040503050406030204" pitchFamily="18" charset="0"/>
-            </a:endParaRPr>
           </a:p>
           <a:p>
             <a:r>
@@ -14716,10 +14492,6 @@
               </a:rPr>
               <a:t>}</a:t>
             </a:r>
-            <a:endParaRPr lang="en-IN" sz="2000" dirty="0">
-              <a:latin typeface="Cambria" panose="02040503050406030204" pitchFamily="18" charset="0"/>
-              <a:ea typeface="Cambria" panose="02040503050406030204" pitchFamily="18" charset="0"/>
-            </a:endParaRPr>
           </a:p>
           <a:p>
             <a:r>
@@ -17704,7 +17476,7 @@
       </p:sp>
       <p:pic>
         <p:nvPicPr>
-          <p:cNvPr id="2" name="Picture 1"/>
+          <p:cNvPr id="3" name="Picture 2"/>
           <p:cNvPicPr>
             <a:picLocks noChangeAspect="1"/>
           </p:cNvPicPr>
@@ -17724,38 +17496,26 @@
         </p:blipFill>
         <p:spPr>
           <a:xfrm>
-            <a:off x="1969478" y="1300162"/>
-            <a:ext cx="7624688" cy="4931826"/>
+            <a:off x="1477108" y="1322363"/>
+            <a:ext cx="9114692" cy="4804886"/>
           </a:xfrm>
-          <a:prstGeom prst="roundRect">
-            <a:avLst>
-              <a:gd name="adj" fmla="val 4167"/>
-            </a:avLst>
+          <a:prstGeom prst="rect">
+            <a:avLst/>
           </a:prstGeom>
-          <a:solidFill>
-            <a:srgbClr val="FFFFFF"/>
-          </a:solidFill>
-          <a:ln w="76200" cap="sq">
+          <a:ln w="38100" cap="sq">
             <a:solidFill>
-              <a:srgbClr val="292929"/>
+              <a:srgbClr val="000000"/>
             </a:solidFill>
+            <a:prstDash val="solid"/>
             <a:miter lim="800000"/>
           </a:ln>
           <a:effectLst>
-            <a:reflection blurRad="12700" stA="28000" endPos="28000" dist="5000" dir="5400000" sy="-100000" algn="bl" rotWithShape="0"/>
+            <a:outerShdw blurRad="50800" dist="38100" dir="2700000" algn="tl" rotWithShape="0">
+              <a:srgbClr val="000000">
+                <a:alpha val="43000"/>
+              </a:srgbClr>
+            </a:outerShdw>
           </a:effectLst>
-          <a:scene3d>
-            <a:camera prst="orthographicFront"/>
-            <a:lightRig rig="threePt" dir="t">
-              <a:rot lat="0" lon="0" rev="2700000"/>
-            </a:lightRig>
-          </a:scene3d>
-          <a:sp3d>
-            <a:bevelT h="38100"/>
-            <a:contourClr>
-              <a:srgbClr val="C0C0C0"/>
-            </a:contourClr>
-          </a:sp3d>
         </p:spPr>
       </p:pic>
     </p:spTree>
@@ -17856,13 +17616,20 @@
             </a:r>
           </a:p>
           <a:p>
+            <a:pPr marL="342900" indent="-342900">
+              <a:buFont typeface="Arial" panose="020B0604020202020204" pitchFamily="34" charset="0"/>
+              <a:buChar char="•"/>
+            </a:pPr>
             <a:endParaRPr lang="en-US" sz="2000" b="1" dirty="0">
               <a:latin typeface="Cambria" panose="02040503050406030204" pitchFamily="18" charset="0"/>
               <a:ea typeface="Cambria" panose="02040503050406030204" pitchFamily="18" charset="0"/>
             </a:endParaRPr>
           </a:p>
           <a:p>
-            <a:pPr fontAlgn="base"/>
+            <a:pPr marL="342900" indent="-342900" fontAlgn="base">
+              <a:buFont typeface="Arial" panose="020B0604020202020204" pitchFamily="34" charset="0"/>
+              <a:buChar char="•"/>
+            </a:pPr>
             <a:r>
               <a:rPr lang="en-US" sz="2000" dirty="0">
                 <a:latin typeface="Cambria" panose="02040503050406030204" pitchFamily="18" charset="0"/>
@@ -17886,7 +17653,10 @@
             </a:r>
           </a:p>
           <a:p>
-            <a:pPr fontAlgn="base"/>
+            <a:pPr marL="342900" indent="-342900" fontAlgn="base">
+              <a:buFont typeface="Arial" panose="020B0604020202020204" pitchFamily="34" charset="0"/>
+              <a:buChar char="•"/>
+            </a:pPr>
             <a:r>
               <a:rPr lang="en-US" sz="2000" dirty="0">
                 <a:latin typeface="Cambria" panose="02040503050406030204" pitchFamily="18" charset="0"/>
@@ -17896,7 +17666,10 @@
             </a:r>
           </a:p>
           <a:p>
-            <a:pPr lvl="1" fontAlgn="base"/>
+            <a:pPr marL="342900" lvl="1" indent="-342900" fontAlgn="base">
+              <a:buFont typeface="Arial" panose="020B0604020202020204" pitchFamily="34" charset="0"/>
+              <a:buChar char="•"/>
+            </a:pPr>
             <a:r>
               <a:rPr lang="en-US" sz="2000" dirty="0">
                 <a:latin typeface="Cambria" panose="02040503050406030204" pitchFamily="18" charset="0"/>
@@ -17906,7 +17679,10 @@
             </a:r>
           </a:p>
           <a:p>
-            <a:pPr lvl="1" fontAlgn="base"/>
+            <a:pPr marL="342900" lvl="1" indent="-342900" fontAlgn="base">
+              <a:buFont typeface="Arial" panose="020B0604020202020204" pitchFamily="34" charset="0"/>
+              <a:buChar char="•"/>
+            </a:pPr>
             <a:r>
               <a:rPr lang="en-US" sz="2000" dirty="0">
                 <a:latin typeface="Cambria" panose="02040503050406030204" pitchFamily="18" charset="0"/>
@@ -17916,7 +17692,10 @@
             </a:r>
           </a:p>
           <a:p>
-            <a:pPr fontAlgn="base"/>
+            <a:pPr marL="342900" indent="-342900" fontAlgn="base">
+              <a:buFont typeface="Arial" panose="020B0604020202020204" pitchFamily="34" charset="0"/>
+              <a:buChar char="•"/>
+            </a:pPr>
             <a:r>
               <a:rPr lang="en-US" sz="2000" dirty="0">
                 <a:latin typeface="Cambria" panose="02040503050406030204" pitchFamily="18" charset="0"/>
@@ -17926,7 +17705,10 @@
             </a:r>
           </a:p>
           <a:p>
-            <a:pPr lvl="1" fontAlgn="base"/>
+            <a:pPr marL="342900" lvl="1" indent="-342900" fontAlgn="base">
+              <a:buFont typeface="Wingdings" panose="05000000000000000000" pitchFamily="2" charset="2"/>
+              <a:buChar char="q"/>
+            </a:pPr>
             <a:r>
               <a:rPr lang="en-US" sz="2000" dirty="0" err="1">
                 <a:latin typeface="Cambria" panose="02040503050406030204" pitchFamily="18" charset="0"/>
@@ -17940,7 +17722,10 @@
             </a:endParaRPr>
           </a:p>
           <a:p>
-            <a:pPr lvl="1" fontAlgn="base"/>
+            <a:pPr marL="342900" lvl="1" indent="-342900" fontAlgn="base">
+              <a:buFont typeface="Wingdings" panose="05000000000000000000" pitchFamily="2" charset="2"/>
+              <a:buChar char="q"/>
+            </a:pPr>
             <a:r>
               <a:rPr lang="en-US" sz="2000" dirty="0" err="1">
                 <a:latin typeface="Cambria" panose="02040503050406030204" pitchFamily="18" charset="0"/>
@@ -17954,7 +17739,10 @@
             </a:endParaRPr>
           </a:p>
           <a:p>
-            <a:pPr lvl="1" fontAlgn="base"/>
+            <a:pPr marL="342900" lvl="1" indent="-342900" fontAlgn="base">
+              <a:buFont typeface="Wingdings" panose="05000000000000000000" pitchFamily="2" charset="2"/>
+              <a:buChar char="q"/>
+            </a:pPr>
             <a:r>
               <a:rPr lang="en-US" sz="2000" dirty="0" err="1" smtClean="0">
                 <a:latin typeface="Cambria" panose="02040503050406030204" pitchFamily="18" charset="0"/>
@@ -17995,10 +17783,6 @@
               </a:rPr>
               <a:t>import java.io.*;</a:t>
             </a:r>
-            <a:endParaRPr lang="en-US" sz="2000" dirty="0">
-              <a:latin typeface="Cambria" panose="02040503050406030204" pitchFamily="18" charset="0"/>
-              <a:ea typeface="Cambria" panose="02040503050406030204" pitchFamily="18" charset="0"/>
-            </a:endParaRPr>
           </a:p>
           <a:p>
             <a:r>
@@ -18021,10 +17805,6 @@
               </a:rPr>
               <a:t>class Demo {</a:t>
             </a:r>
-            <a:endParaRPr lang="en-US" sz="2000" dirty="0">
-              <a:latin typeface="Cambria" panose="02040503050406030204" pitchFamily="18" charset="0"/>
-              <a:ea typeface="Cambria" panose="02040503050406030204" pitchFamily="18" charset="0"/>
-            </a:endParaRPr>
           </a:p>
           <a:p>
             <a:r>
@@ -18062,10 +17842,6 @@
               </a:rPr>
               <a:t> {</a:t>
             </a:r>
-            <a:endParaRPr lang="en-US" sz="2000" dirty="0">
-              <a:latin typeface="Cambria" panose="02040503050406030204" pitchFamily="18" charset="0"/>
-              <a:ea typeface="Cambria" panose="02040503050406030204" pitchFamily="18" charset="0"/>
-            </a:endParaRPr>
           </a:p>
           <a:p>
             <a:r>
@@ -18103,10 +17879,6 @@
               </a:rPr>
               <a:t>("data.txt");</a:t>
             </a:r>
-            <a:endParaRPr lang="en-US" sz="2000" dirty="0">
-              <a:latin typeface="Cambria" panose="02040503050406030204" pitchFamily="18" charset="0"/>
-              <a:ea typeface="Cambria" panose="02040503050406030204" pitchFamily="18" charset="0"/>
-            </a:endParaRPr>
           </a:p>
           <a:p>
             <a:r>
@@ -18116,10 +17888,6 @@
               </a:rPr>
               <a:t>    }</a:t>
             </a:r>
-            <a:endParaRPr lang="en-US" sz="2000" dirty="0">
-              <a:latin typeface="Cambria" panose="02040503050406030204" pitchFamily="18" charset="0"/>
-              <a:ea typeface="Cambria" panose="02040503050406030204" pitchFamily="18" charset="0"/>
-            </a:endParaRPr>
           </a:p>
           <a:p>
             <a:r>
@@ -18129,10 +17897,6 @@
               </a:rPr>
               <a:t>}</a:t>
             </a:r>
-            <a:endParaRPr lang="en-US" sz="2000" dirty="0">
-              <a:latin typeface="Cambria" panose="02040503050406030204" pitchFamily="18" charset="0"/>
-              <a:ea typeface="Cambria" panose="02040503050406030204" pitchFamily="18" charset="0"/>
-            </a:endParaRPr>
           </a:p>
           <a:p>
             <a:endParaRPr lang="en-US" sz="2000" b="1" dirty="0">
